--- a/artifacts/editorial_accent_20261022/pptx/Figure10_Accent.pptx
+++ b/artifacts/editorial_accent_20261022/pptx/Figure10_Accent.pptx
@@ -52,6 +52,14 @@
 <file path=ppt/slides/slide1.xml><?xml version="1.0" encoding="utf-8"?>
 <p:sld xmlns:a="http://schemas.openxmlformats.org/drawingml/2006/main" xmlns:r="http://schemas.openxmlformats.org/officeDocument/2006/relationships" xmlns:p="http://schemas.openxmlformats.org/presentationml/2006/main">
   <p:cSld>
+    <p:bg>
+      <p:bgPr>
+        <a:solidFill>
+          <a:srgbClr val="FFFFFF"/>
+        </a:solidFill>
+        <a:effectLst/>
+      </p:bgPr>
+    </p:bg>
     <p:spTree>
       <p:nvGrpSpPr>
         <p:cNvPr id="1" name=""/>
@@ -844,6 +852,10 @@
                   </a:solidFill>
                 </a:ln>
               </p:spPr>
+              <p:txBody>
+                <a:bodyPr/>
+                <a:p/>
+              </p:txBody>
             </p:sp>
             <p:sp>
               <p:nvSpPr>
@@ -1546,6 +1558,10 @@
                   </a:solidFill>
                 </a:ln>
               </p:spPr>
+              <p:txBody>
+                <a:bodyPr/>
+                <a:p/>
+              </p:txBody>
             </p:sp>
             <p:sp>
               <p:nvSpPr>
@@ -2248,6 +2264,10 @@
                   </a:solidFill>
                 </a:ln>
               </p:spPr>
+              <p:txBody>
+                <a:bodyPr/>
+                <a:p/>
+              </p:txBody>
             </p:sp>
             <p:pic>
               <p:nvPicPr>
@@ -2420,7 +2440,7 @@
                       <a:solidFill>
                         <a:srgbClr val="222222"/>
                       </a:solidFill>
-                      <a:latin typeface="Comic Sans MS"/>
+                      <a:latin typeface="Times New Roman"/>
                       <a:ea typeface="Times New Roman"/>
                       <a:cs typeface="Times New Roman"/>
                     </a:rPr>
@@ -2463,7 +2483,7 @@
                       <a:solidFill>
                         <a:srgbClr val="222222"/>
                       </a:solidFill>
-                      <a:latin typeface="Arial"/>
+                      <a:latin typeface="Times New Roman"/>
                       <a:ea typeface="Times New Roman"/>
                       <a:cs typeface="Times New Roman"/>
                     </a:rPr>
@@ -2506,7 +2526,7 @@
                       <a:solidFill>
                         <a:srgbClr val="222222"/>
                       </a:solidFill>
-                      <a:latin typeface="Arial"/>
+                      <a:latin typeface="Times New Roman"/>
                       <a:ea typeface="Times New Roman"/>
                       <a:cs typeface="Times New Roman"/>
                     </a:rPr>
@@ -2549,7 +2569,7 @@
                       <a:solidFill>
                         <a:srgbClr val="222222"/>
                       </a:solidFill>
-                      <a:latin typeface="Arial"/>
+                      <a:latin typeface="Times New Roman"/>
                       <a:ea typeface="Times New Roman"/>
                       <a:cs typeface="Times New Roman"/>
                     </a:rPr>
@@ -2592,7 +2612,7 @@
                       <a:solidFill>
                         <a:srgbClr val="222222"/>
                       </a:solidFill>
-                      <a:latin typeface="Arial"/>
+                      <a:latin typeface="Times New Roman"/>
                       <a:ea typeface="Times New Roman"/>
                       <a:cs typeface="Times New Roman"/>
                     </a:rPr>
@@ -2635,7 +2655,7 @@
                       <a:solidFill>
                         <a:srgbClr val="222222"/>
                       </a:solidFill>
-                      <a:latin typeface="Arial"/>
+                      <a:latin typeface="Times New Roman"/>
                       <a:ea typeface="Times New Roman"/>
                       <a:cs typeface="Times New Roman"/>
                     </a:rPr>
@@ -2825,7 +2845,7 @@
                       <a:solidFill>
                         <a:srgbClr val="222222"/>
                       </a:solidFill>
-                      <a:latin typeface="Comic Sans MS"/>
+                      <a:latin typeface="Times New Roman"/>
                       <a:ea typeface="Times New Roman"/>
                       <a:cs typeface="Times New Roman"/>
                     </a:rPr>
@@ -2868,7 +2888,7 @@
                       <a:solidFill>
                         <a:srgbClr val="222222"/>
                       </a:solidFill>
-                      <a:latin typeface="Arial"/>
+                      <a:latin typeface="Times New Roman"/>
                       <a:ea typeface="Times New Roman"/>
                       <a:cs typeface="Times New Roman"/>
                     </a:rPr>
@@ -2911,7 +2931,7 @@
                       <a:solidFill>
                         <a:srgbClr val="222222"/>
                       </a:solidFill>
-                      <a:latin typeface="Arial"/>
+                      <a:latin typeface="Times New Roman"/>
                       <a:ea typeface="Times New Roman"/>
                       <a:cs typeface="Times New Roman"/>
                     </a:rPr>
@@ -2954,7 +2974,7 @@
                       <a:solidFill>
                         <a:srgbClr val="222222"/>
                       </a:solidFill>
-                      <a:latin typeface="Arial"/>
+                      <a:latin typeface="Times New Roman"/>
                       <a:ea typeface="Times New Roman"/>
                       <a:cs typeface="Times New Roman"/>
                     </a:rPr>
@@ -2997,7 +3017,7 @@
                       <a:solidFill>
                         <a:srgbClr val="222222"/>
                       </a:solidFill>
-                      <a:latin typeface="Arial"/>
+                      <a:latin typeface="Times New Roman"/>
                       <a:ea typeface="Times New Roman"/>
                       <a:cs typeface="Times New Roman"/>
                     </a:rPr>
@@ -3040,7 +3060,7 @@
                       <a:solidFill>
                         <a:srgbClr val="222222"/>
                       </a:solidFill>
-                      <a:latin typeface="Arial"/>
+                      <a:latin typeface="Times New Roman"/>
                       <a:ea typeface="Times New Roman"/>
                       <a:cs typeface="Times New Roman"/>
                     </a:rPr>
@@ -3083,7 +3103,7 @@
                       <a:solidFill>
                         <a:srgbClr val="222222"/>
                       </a:solidFill>
-                      <a:latin typeface="Arial"/>
+                      <a:latin typeface="Times New Roman"/>
                       <a:ea typeface="Times New Roman"/>
                       <a:cs typeface="Times New Roman"/>
                     </a:rPr>
@@ -3126,7 +3146,7 @@
                       <a:solidFill>
                         <a:srgbClr val="222222"/>
                       </a:solidFill>
-                      <a:latin typeface="Arial"/>
+                      <a:latin typeface="Times New Roman"/>
                       <a:ea typeface="Times New Roman"/>
                       <a:cs typeface="Times New Roman"/>
                     </a:rPr>
@@ -3169,7 +3189,7 @@
                       <a:solidFill>
                         <a:srgbClr val="222222"/>
                       </a:solidFill>
-                      <a:latin typeface="Arial"/>
+                      <a:latin typeface="Times New Roman"/>
                       <a:ea typeface="Times New Roman"/>
                       <a:cs typeface="Times New Roman"/>
                     </a:rPr>
@@ -3788,7 +3808,7 @@
                       <a:solidFill>
                         <a:srgbClr val="222222"/>
                       </a:solidFill>
-                      <a:latin typeface="Comic Sans MS"/>
+                      <a:latin typeface="Times New Roman"/>
                       <a:ea typeface="Times New Roman"/>
                       <a:cs typeface="Times New Roman"/>
                     </a:rPr>
@@ -3831,7 +3851,7 @@
                       <a:solidFill>
                         <a:srgbClr val="222222"/>
                       </a:solidFill>
-                      <a:latin typeface="Arial"/>
+                      <a:latin typeface="Times New Roman"/>
                       <a:ea typeface="Times New Roman"/>
                       <a:cs typeface="Times New Roman"/>
                     </a:rPr>
@@ -3874,7 +3894,7 @@
                       <a:solidFill>
                         <a:srgbClr val="222222"/>
                       </a:solidFill>
-                      <a:latin typeface="Arial"/>
+                      <a:latin typeface="Times New Roman"/>
                       <a:ea typeface="Times New Roman"/>
                       <a:cs typeface="Times New Roman"/>
                     </a:rPr>
@@ -3917,7 +3937,7 @@
                       <a:solidFill>
                         <a:srgbClr val="222222"/>
                       </a:solidFill>
-                      <a:latin typeface="Arial"/>
+                      <a:latin typeface="Times New Roman"/>
                       <a:ea typeface="Times New Roman"/>
                       <a:cs typeface="Times New Roman"/>
                     </a:rPr>
@@ -3960,7 +3980,7 @@
                       <a:solidFill>
                         <a:srgbClr val="222222"/>
                       </a:solidFill>
-                      <a:latin typeface="Arial"/>
+                      <a:latin typeface="Times New Roman"/>
                       <a:ea typeface="Times New Roman"/>
                       <a:cs typeface="Times New Roman"/>
                     </a:rPr>
@@ -4579,7 +4599,7 @@
                       <a:solidFill>
                         <a:srgbClr val="222222"/>
                       </a:solidFill>
-                      <a:latin typeface="Comic Sans MS"/>
+                      <a:latin typeface="Times New Roman"/>
                       <a:ea typeface="Times New Roman"/>
                       <a:cs typeface="Times New Roman"/>
                     </a:rPr>
@@ -4622,7 +4642,7 @@
                       <a:solidFill>
                         <a:srgbClr val="222222"/>
                       </a:solidFill>
-                      <a:latin typeface="Arial"/>
+                      <a:latin typeface="Times New Roman"/>
                       <a:ea typeface="Times New Roman"/>
                       <a:cs typeface="Times New Roman"/>
                     </a:rPr>
@@ -4665,7 +4685,7 @@
                       <a:solidFill>
                         <a:srgbClr val="222222"/>
                       </a:solidFill>
-                      <a:latin typeface="Arial"/>
+                      <a:latin typeface="Times New Roman"/>
                       <a:ea typeface="Times New Roman"/>
                       <a:cs typeface="Times New Roman"/>
                     </a:rPr>
@@ -4708,7 +4728,7 @@
                       <a:solidFill>
                         <a:srgbClr val="222222"/>
                       </a:solidFill>
-                      <a:latin typeface="Arial"/>
+                      <a:latin typeface="Times New Roman"/>
                       <a:ea typeface="Times New Roman"/>
                       <a:cs typeface="Times New Roman"/>
                     </a:rPr>
@@ -4751,7 +4771,7 @@
                       <a:solidFill>
                         <a:srgbClr val="222222"/>
                       </a:solidFill>
-                      <a:latin typeface="Arial"/>
+                      <a:latin typeface="Times New Roman"/>
                       <a:ea typeface="Times New Roman"/>
                       <a:cs typeface="Times New Roman"/>
                     </a:rPr>
@@ -5093,7 +5113,7 @@
                       <a:solidFill>
                         <a:srgbClr val="222222"/>
                       </a:solidFill>
-                      <a:latin typeface="Arial"/>
+                      <a:latin typeface="Times New Roman"/>
                       <a:ea typeface="Times New Roman"/>
                       <a:cs typeface="Times New Roman"/>
                     </a:rPr>
@@ -5166,7 +5186,7 @@
                       <a:solidFill>
                         <a:srgbClr val="222222"/>
                       </a:solidFill>
-                      <a:latin typeface="Comic Sans MS"/>
+                      <a:latin typeface="Times New Roman"/>
                       <a:ea typeface="Times New Roman"/>
                       <a:cs typeface="Times New Roman"/>
                     </a:rPr>
@@ -5209,7 +5229,7 @@
                       <a:solidFill>
                         <a:srgbClr val="222222"/>
                       </a:solidFill>
-                      <a:latin typeface="Arial"/>
+                      <a:latin typeface="Times New Roman"/>
                       <a:ea typeface="Times New Roman"/>
                       <a:cs typeface="Times New Roman"/>
                     </a:rPr>
@@ -5294,7 +5314,7 @@
                       <a:solidFill>
                         <a:srgbClr val="222222"/>
                       </a:solidFill>
-                      <a:latin typeface="Arial"/>
+                      <a:latin typeface="Times New Roman"/>
                       <a:ea typeface="Times New Roman"/>
                       <a:cs typeface="Times New Roman"/>
                     </a:rPr>
@@ -5337,7 +5357,7 @@
                       <a:solidFill>
                         <a:srgbClr val="222222"/>
                       </a:solidFill>
-                      <a:latin typeface="Arial"/>
+                      <a:latin typeface="Times New Roman"/>
                       <a:ea typeface="Times New Roman"/>
                       <a:cs typeface="Times New Roman"/>
                     </a:rPr>
@@ -5688,7 +5708,7 @@
                       <a:solidFill>
                         <a:srgbClr val="222222"/>
                       </a:solidFill>
-                      <a:latin typeface="Arial"/>
+                      <a:latin typeface="Times New Roman"/>
                       <a:ea typeface="Times New Roman"/>
                       <a:cs typeface="Times New Roman"/>
                     </a:rPr>
@@ -6710,6 +6730,10 @@
                   </a:solidFill>
                 </a:ln>
               </p:spPr>
+              <p:txBody>
+                <a:bodyPr/>
+                <a:p/>
+              </p:txBody>
             </p:sp>
             <p:sp>
               <p:nvSpPr>
@@ -6733,6 +6757,10 @@
                   <a:prstDash val="dash"/>
                 </a:ln>
               </p:spPr>
+              <p:txBody>
+                <a:bodyPr/>
+                <a:p/>
+              </p:txBody>
             </p:sp>
             <p:sp>
               <p:nvSpPr>
@@ -6765,7 +6793,7 @@
                       <a:solidFill>
                         <a:srgbClr val="222222"/>
                       </a:solidFill>
-                      <a:latin typeface="Arial"/>
+                      <a:latin typeface="Times New Roman"/>
                       <a:ea typeface="Times New Roman"/>
                       <a:cs typeface="Times New Roman"/>
                     </a:rPr>

--- a/artifacts/editorial_accent_20261022/pptx/Figure10_Accent.pptx
+++ b/artifacts/editorial_accent_20261022/pptx/Figure10_Accent.pptx
@@ -52,14 +52,6 @@
 <file path=ppt/slides/slide1.xml><?xml version="1.0" encoding="utf-8"?>
 <p:sld xmlns:a="http://schemas.openxmlformats.org/drawingml/2006/main" xmlns:r="http://schemas.openxmlformats.org/officeDocument/2006/relationships" xmlns:p="http://schemas.openxmlformats.org/presentationml/2006/main">
   <p:cSld>
-    <p:bg>
-      <p:bgPr>
-        <a:solidFill>
-          <a:srgbClr val="FFFFFF"/>
-        </a:solidFill>
-        <a:effectLst/>
-      </p:bgPr>
-    </p:bg>
     <p:spTree>
       <p:nvGrpSpPr>
         <p:cNvPr id="1" name=""/>
@@ -852,10 +844,6 @@
                   </a:solidFill>
                 </a:ln>
               </p:spPr>
-              <p:txBody>
-                <a:bodyPr/>
-                <a:p/>
-              </p:txBody>
             </p:sp>
             <p:sp>
               <p:nvSpPr>
@@ -1558,10 +1546,6 @@
                   </a:solidFill>
                 </a:ln>
               </p:spPr>
-              <p:txBody>
-                <a:bodyPr/>
-                <a:p/>
-              </p:txBody>
             </p:sp>
             <p:sp>
               <p:nvSpPr>
@@ -2264,10 +2248,6 @@
                   </a:solidFill>
                 </a:ln>
               </p:spPr>
-              <p:txBody>
-                <a:bodyPr/>
-                <a:p/>
-              </p:txBody>
             </p:sp>
             <p:pic>
               <p:nvPicPr>
@@ -2440,7 +2420,7 @@
                       <a:solidFill>
                         <a:srgbClr val="222222"/>
                       </a:solidFill>
-                      <a:latin typeface="Times New Roman"/>
+                      <a:latin typeface="Comic Sans MS"/>
                       <a:ea typeface="Times New Roman"/>
                       <a:cs typeface="Times New Roman"/>
                     </a:rPr>
@@ -2483,7 +2463,7 @@
                       <a:solidFill>
                         <a:srgbClr val="222222"/>
                       </a:solidFill>
-                      <a:latin typeface="Times New Roman"/>
+                      <a:latin typeface="Arial"/>
                       <a:ea typeface="Times New Roman"/>
                       <a:cs typeface="Times New Roman"/>
                     </a:rPr>
@@ -2526,7 +2506,7 @@
                       <a:solidFill>
                         <a:srgbClr val="222222"/>
                       </a:solidFill>
-                      <a:latin typeface="Times New Roman"/>
+                      <a:latin typeface="Arial"/>
                       <a:ea typeface="Times New Roman"/>
                       <a:cs typeface="Times New Roman"/>
                     </a:rPr>
@@ -2569,7 +2549,7 @@
                       <a:solidFill>
                         <a:srgbClr val="222222"/>
                       </a:solidFill>
-                      <a:latin typeface="Times New Roman"/>
+                      <a:latin typeface="Arial"/>
                       <a:ea typeface="Times New Roman"/>
                       <a:cs typeface="Times New Roman"/>
                     </a:rPr>
@@ -2612,7 +2592,7 @@
                       <a:solidFill>
                         <a:srgbClr val="222222"/>
                       </a:solidFill>
-                      <a:latin typeface="Times New Roman"/>
+                      <a:latin typeface="Arial"/>
                       <a:ea typeface="Times New Roman"/>
                       <a:cs typeface="Times New Roman"/>
                     </a:rPr>
@@ -2655,7 +2635,7 @@
                       <a:solidFill>
                         <a:srgbClr val="222222"/>
                       </a:solidFill>
-                      <a:latin typeface="Times New Roman"/>
+                      <a:latin typeface="Arial"/>
                       <a:ea typeface="Times New Roman"/>
                       <a:cs typeface="Times New Roman"/>
                     </a:rPr>
@@ -2845,7 +2825,7 @@
                       <a:solidFill>
                         <a:srgbClr val="222222"/>
                       </a:solidFill>
-                      <a:latin typeface="Times New Roman"/>
+                      <a:latin typeface="Comic Sans MS"/>
                       <a:ea typeface="Times New Roman"/>
                       <a:cs typeface="Times New Roman"/>
                     </a:rPr>
@@ -2888,7 +2868,7 @@
                       <a:solidFill>
                         <a:srgbClr val="222222"/>
                       </a:solidFill>
-                      <a:latin typeface="Times New Roman"/>
+                      <a:latin typeface="Arial"/>
                       <a:ea typeface="Times New Roman"/>
                       <a:cs typeface="Times New Roman"/>
                     </a:rPr>
@@ -2931,7 +2911,7 @@
                       <a:solidFill>
                         <a:srgbClr val="222222"/>
                       </a:solidFill>
-                      <a:latin typeface="Times New Roman"/>
+                      <a:latin typeface="Arial"/>
                       <a:ea typeface="Times New Roman"/>
                       <a:cs typeface="Times New Roman"/>
                     </a:rPr>
@@ -2974,7 +2954,7 @@
                       <a:solidFill>
                         <a:srgbClr val="222222"/>
                       </a:solidFill>
-                      <a:latin typeface="Times New Roman"/>
+                      <a:latin typeface="Arial"/>
                       <a:ea typeface="Times New Roman"/>
                       <a:cs typeface="Times New Roman"/>
                     </a:rPr>
@@ -3017,7 +2997,7 @@
                       <a:solidFill>
                         <a:srgbClr val="222222"/>
                       </a:solidFill>
-                      <a:latin typeface="Times New Roman"/>
+                      <a:latin typeface="Arial"/>
                       <a:ea typeface="Times New Roman"/>
                       <a:cs typeface="Times New Roman"/>
                     </a:rPr>
@@ -3060,7 +3040,7 @@
                       <a:solidFill>
                         <a:srgbClr val="222222"/>
                       </a:solidFill>
-                      <a:latin typeface="Times New Roman"/>
+                      <a:latin typeface="Arial"/>
                       <a:ea typeface="Times New Roman"/>
                       <a:cs typeface="Times New Roman"/>
                     </a:rPr>
@@ -3103,7 +3083,7 @@
                       <a:solidFill>
                         <a:srgbClr val="222222"/>
                       </a:solidFill>
-                      <a:latin typeface="Times New Roman"/>
+                      <a:latin typeface="Arial"/>
                       <a:ea typeface="Times New Roman"/>
                       <a:cs typeface="Times New Roman"/>
                     </a:rPr>
@@ -3146,7 +3126,7 @@
                       <a:solidFill>
                         <a:srgbClr val="222222"/>
                       </a:solidFill>
-                      <a:latin typeface="Times New Roman"/>
+                      <a:latin typeface="Arial"/>
                       <a:ea typeface="Times New Roman"/>
                       <a:cs typeface="Times New Roman"/>
                     </a:rPr>
@@ -3189,7 +3169,7 @@
                       <a:solidFill>
                         <a:srgbClr val="222222"/>
                       </a:solidFill>
-                      <a:latin typeface="Times New Roman"/>
+                      <a:latin typeface="Arial"/>
                       <a:ea typeface="Times New Roman"/>
                       <a:cs typeface="Times New Roman"/>
                     </a:rPr>
@@ -3808,7 +3788,7 @@
                       <a:solidFill>
                         <a:srgbClr val="222222"/>
                       </a:solidFill>
-                      <a:latin typeface="Times New Roman"/>
+                      <a:latin typeface="Comic Sans MS"/>
                       <a:ea typeface="Times New Roman"/>
                       <a:cs typeface="Times New Roman"/>
                     </a:rPr>
@@ -3851,7 +3831,7 @@
                       <a:solidFill>
                         <a:srgbClr val="222222"/>
                       </a:solidFill>
-                      <a:latin typeface="Times New Roman"/>
+                      <a:latin typeface="Arial"/>
                       <a:ea typeface="Times New Roman"/>
                       <a:cs typeface="Times New Roman"/>
                     </a:rPr>
@@ -3894,7 +3874,7 @@
                       <a:solidFill>
                         <a:srgbClr val="222222"/>
                       </a:solidFill>
-                      <a:latin typeface="Times New Roman"/>
+                      <a:latin typeface="Arial"/>
                       <a:ea typeface="Times New Roman"/>
                       <a:cs typeface="Times New Roman"/>
                     </a:rPr>
@@ -3937,7 +3917,7 @@
                       <a:solidFill>
                         <a:srgbClr val="222222"/>
                       </a:solidFill>
-                      <a:latin typeface="Times New Roman"/>
+                      <a:latin typeface="Arial"/>
                       <a:ea typeface="Times New Roman"/>
                       <a:cs typeface="Times New Roman"/>
                     </a:rPr>
@@ -3980,7 +3960,7 @@
                       <a:solidFill>
                         <a:srgbClr val="222222"/>
                       </a:solidFill>
-                      <a:latin typeface="Times New Roman"/>
+                      <a:latin typeface="Arial"/>
                       <a:ea typeface="Times New Roman"/>
                       <a:cs typeface="Times New Roman"/>
                     </a:rPr>
@@ -4599,7 +4579,7 @@
                       <a:solidFill>
                         <a:srgbClr val="222222"/>
                       </a:solidFill>
-                      <a:latin typeface="Times New Roman"/>
+                      <a:latin typeface="Comic Sans MS"/>
                       <a:ea typeface="Times New Roman"/>
                       <a:cs typeface="Times New Roman"/>
                     </a:rPr>
@@ -4642,7 +4622,7 @@
                       <a:solidFill>
                         <a:srgbClr val="222222"/>
                       </a:solidFill>
-                      <a:latin typeface="Times New Roman"/>
+                      <a:latin typeface="Arial"/>
                       <a:ea typeface="Times New Roman"/>
                       <a:cs typeface="Times New Roman"/>
                     </a:rPr>
@@ -4685,7 +4665,7 @@
                       <a:solidFill>
                         <a:srgbClr val="222222"/>
                       </a:solidFill>
-                      <a:latin typeface="Times New Roman"/>
+                      <a:latin typeface="Arial"/>
                       <a:ea typeface="Times New Roman"/>
                       <a:cs typeface="Times New Roman"/>
                     </a:rPr>
@@ -4728,7 +4708,7 @@
                       <a:solidFill>
                         <a:srgbClr val="222222"/>
                       </a:solidFill>
-                      <a:latin typeface="Times New Roman"/>
+                      <a:latin typeface="Arial"/>
                       <a:ea typeface="Times New Roman"/>
                       <a:cs typeface="Times New Roman"/>
                     </a:rPr>
@@ -4771,7 +4751,7 @@
                       <a:solidFill>
                         <a:srgbClr val="222222"/>
                       </a:solidFill>
-                      <a:latin typeface="Times New Roman"/>
+                      <a:latin typeface="Arial"/>
                       <a:ea typeface="Times New Roman"/>
                       <a:cs typeface="Times New Roman"/>
                     </a:rPr>
@@ -5113,7 +5093,7 @@
                       <a:solidFill>
                         <a:srgbClr val="222222"/>
                       </a:solidFill>
-                      <a:latin typeface="Times New Roman"/>
+                      <a:latin typeface="Arial"/>
                       <a:ea typeface="Times New Roman"/>
                       <a:cs typeface="Times New Roman"/>
                     </a:rPr>
@@ -5186,7 +5166,7 @@
                       <a:solidFill>
                         <a:srgbClr val="222222"/>
                       </a:solidFill>
-                      <a:latin typeface="Times New Roman"/>
+                      <a:latin typeface="Comic Sans MS"/>
                       <a:ea typeface="Times New Roman"/>
                       <a:cs typeface="Times New Roman"/>
                     </a:rPr>
@@ -5229,7 +5209,7 @@
                       <a:solidFill>
                         <a:srgbClr val="222222"/>
                       </a:solidFill>
-                      <a:latin typeface="Times New Roman"/>
+                      <a:latin typeface="Arial"/>
                       <a:ea typeface="Times New Roman"/>
                       <a:cs typeface="Times New Roman"/>
                     </a:rPr>
@@ -5314,7 +5294,7 @@
                       <a:solidFill>
                         <a:srgbClr val="222222"/>
                       </a:solidFill>
-                      <a:latin typeface="Times New Roman"/>
+                      <a:latin typeface="Arial"/>
                       <a:ea typeface="Times New Roman"/>
                       <a:cs typeface="Times New Roman"/>
                     </a:rPr>
@@ -5357,7 +5337,7 @@
                       <a:solidFill>
                         <a:srgbClr val="222222"/>
                       </a:solidFill>
-                      <a:latin typeface="Times New Roman"/>
+                      <a:latin typeface="Arial"/>
                       <a:ea typeface="Times New Roman"/>
                       <a:cs typeface="Times New Roman"/>
                     </a:rPr>
@@ -5708,7 +5688,7 @@
                       <a:solidFill>
                         <a:srgbClr val="222222"/>
                       </a:solidFill>
-                      <a:latin typeface="Times New Roman"/>
+                      <a:latin typeface="Arial"/>
                       <a:ea typeface="Times New Roman"/>
                       <a:cs typeface="Times New Roman"/>
                     </a:rPr>
@@ -6730,10 +6710,6 @@
                   </a:solidFill>
                 </a:ln>
               </p:spPr>
-              <p:txBody>
-                <a:bodyPr/>
-                <a:p/>
-              </p:txBody>
             </p:sp>
             <p:sp>
               <p:nvSpPr>
@@ -6757,10 +6733,6 @@
                   <a:prstDash val="dash"/>
                 </a:ln>
               </p:spPr>
-              <p:txBody>
-                <a:bodyPr/>
-                <a:p/>
-              </p:txBody>
             </p:sp>
             <p:sp>
               <p:nvSpPr>
@@ -6793,7 +6765,7 @@
                       <a:solidFill>
                         <a:srgbClr val="222222"/>
                       </a:solidFill>
-                      <a:latin typeface="Times New Roman"/>
+                      <a:latin typeface="Arial"/>
                       <a:ea typeface="Times New Roman"/>
                       <a:cs typeface="Times New Roman"/>
                     </a:rPr>
